--- a/Functional Teams 2026 v1.1.pptx
+++ b/Functional Teams 2026 v1.1.pptx
@@ -115,14 +115,6 @@
     </p:ext>
   </p:extLst>
 </p:presentation>
-</file>
-
-<file path=ppt/revisionInfo.xml><?xml version="1.0" encoding="utf-8"?>
-<p1510:revInfo xmlns:a="http://schemas.openxmlformats.org/drawingml/2006/main" xmlns:r="http://schemas.openxmlformats.org/officeDocument/2006/relationships" xmlns:p1510="http://schemas.microsoft.com/office/powerpoint/2015/10/main">
-  <p1510:revLst>
-    <p1510:client id="{4B524235-62A1-457A-83A4-1371A9C084A9}" v="2" dt="2026-03-19T18:12:32.276"/>
-  </p1510:revLst>
-</p1510:revInfo>
 </file>
 
 <file path=ppt/diagrams/colors1.xml><?xml version="1.0" encoding="utf-8"?>
